--- a/reports/Cognitive_CanSat_Pitch_Deck.pptx
+++ b/reports/Cognitive_CanSat_Pitch_Deck.pptx
@@ -4479,7 +4479,7 @@
               </a:defRPr>
             </a:pPr>
             <a:r>
-              <a:t>Autonomous Atmospheric Sounding Pico-Satellite Platform | Authors: Maneet Bhuyan, Soumil, Bavesh, and Harsh</a:t>
+              <a:t>Autonomous Atmospheric Sounding Pico-Satellite Platform | Authors: Maneet Bhuyan, Gurbashish Sena Nayak, Shubham Sharma, and Ganesh Vallabh M</a:t>
             </a:r>
           </a:p>
         </p:txBody>

--- a/reports/Cognitive_CanSat_Pitch_Deck.pptx
+++ b/reports/Cognitive_CanSat_Pitch_Deck.pptx
@@ -4479,7 +4479,7 @@
               </a:defRPr>
             </a:pPr>
             <a:r>
-              <a:t>Autonomous Atmospheric Sounding Pico-Satellite Platform | Authors: Maneet Bhuyan, Gurbashish Sena Nayak, Shubham Sharma, and Ganesh Vallabh M</a:t>
+              <a:t>Autonomous Atmospheric Sounding Pico-Satellite Platform | Dept. of CSE, MVJ College of Engineering</a:t>
             </a:r>
           </a:p>
         </p:txBody>
